--- a/public/fun/pack/pptx/birthdaypro/돌잔치프리미엄_20_첫번째이야기중심_피스타치오크림.pptx
+++ b/public/fun/pack/pptx/birthdaypro/돌잔치프리미엄_20_첫번째이야기중심_피스타치오크림.pptx
@@ -112,12 +112,12 @@
   <p:extLst>
     <p:ext uri="{521415D9-36F7-43E2-AB2F-B90AF26B5E84}">
       <p14:sectionLst xmlns:p14="http://schemas.microsoft.com/office/powerpoint/2010/main">
-        <p14:section name="시작" id="{C84015A5-C377-442D-8BD1-2C224F271C25}">
+        <p14:section name="시작" id="{384CAAF9-7EC0-4B5D-8B91-AB50F940DC09}">
           <p14:sldIdLst>
             <p14:sldId id="256"/>
           </p14:sldIdLst>
         </p14:section>
-        <p14:section name="본문" id="{D96D37F6-0807-4AE8-B3AE-FF1AA3B2EDDA}">
+        <p14:section name="본문" id="{99C96D94-1CEB-4A4B-BF94-87579C080EFB}">
           <p14:sldIdLst>
             <p14:sldId id="257"/>
             <p14:sldId id="258"/>
@@ -125,7 +125,7 @@
             <p14:sldId id="260"/>
           </p14:sldIdLst>
         </p14:section>
-        <p14:section name="마무리" id="{8554EDF5-38A5-4352-A8B2-FC29F9C47CC1}">
+        <p14:section name="마무리" id="{F005FF9A-1807-46C3-921F-7031DDBDA154}">
           <p14:sldIdLst>
             <p14:sldId id="261"/>
           </p14:sldIdLst>
@@ -1518,7 +1518,7 @@
             </a:lvl1pPr>
           </a:lstStyle>
           <a:p>
-            <a:fld id="{2584E013-96AB-47E8-9C02-AD29A64E460D}" type="slidenum">
+            <a:fld id="{B9D59B7B-F8DC-46FF-BAF1-7E0AF0320B5B}" type="slidenum">
               <a:rPr lang="en-US"/>
               <a:t>‹#›</a:t>
             </a:fld>
@@ -2243,7 +2243,7 @@
             </a:lvl1pPr>
           </a:lstStyle>
           <a:p>
-            <a:fld id="{394FE1E5-FCB1-4FB3-8BB3-6CD49C40E229}" type="slidenum">
+            <a:fld id="{0AA2F57F-7ECC-4721-9F9D-83067CE91B3C}" type="slidenum">
               <a:rPr lang="en-US"/>
               <a:t>‹#›</a:t>
             </a:fld>
@@ -2924,7 +2924,7 @@
             </a:lvl1pPr>
           </a:lstStyle>
           <a:p>
-            <a:fld id="{8F83635B-8E80-420F-AA1F-0F8311740794}" type="slidenum">
+            <a:fld id="{E77B75D7-C6E9-44A6-ACF9-8F44605D42DB}" type="slidenum">
               <a:rPr lang="en-US"/>
               <a:t>‹#›</a:t>
             </a:fld>
@@ -3787,7 +3787,7 @@
           <a:p>
             <a:r>
               <a:rPr lang="ko-KR"/>
-              <a:t>아기 이름 · 0000. 00. 00</a:t>
+              <a:t>아기 이름 · 날짜 입력</a:t>
             </a:r>
           </a:p>
           <a:p>
@@ -3948,7 +3948,7 @@
           <a:bodyPr/>
           <a:lstStyle/>
           <a:p>
-            <a:fld id="{CBD5AAB4-8373-4BAB-9C31-F27322B6B780}" type="slidenum">
+            <a:fld id="{38EA1EDA-EC8E-47BB-9C9F-C2CCB91A5F7C}" type="slidenum">
               <a:rPr lang="en-US"/>
               <a:t>‹#›</a:t>
             </a:fld>
@@ -4548,7 +4548,7 @@
           <a:bodyPr/>
           <a:lstStyle/>
           <a:p>
-            <a:fld id="{359B3F05-8E06-48DF-BE93-A9185CA52C5D}" type="slidenum">
+            <a:fld id="{5A4B1787-F010-4B35-827A-9854A4B17CED}" type="slidenum">
               <a:rPr lang="en-US"/>
               <a:t>‹#›</a:t>
             </a:fld>
@@ -5390,7 +5390,7 @@
           <a:bodyPr/>
           <a:lstStyle/>
           <a:p>
-            <a:fld id="{8D335AA1-40A4-41D3-9102-B7972A2FF121}" type="slidenum">
+            <a:fld id="{30989C05-B32A-4CC2-96CF-94A6E4BB6D53}" type="slidenum">
               <a:rPr lang="en-US"/>
               <a:t>‹#›</a:t>
             </a:fld>
@@ -7112,7 +7112,7 @@
           <a:bodyPr/>
           <a:lstStyle/>
           <a:p>
-            <a:fld id="{52E6531A-DB48-47B7-81DC-83F3BB24CEF4}" type="slidenum">
+            <a:fld id="{370A8457-8932-4191-8D71-C48AC7B40D7B}" type="slidenum">
               <a:rPr lang="en-US"/>
               <a:t>‹#›</a:t>
             </a:fld>
